--- a/VisScienProject.pptx
+++ b/VisScienProject.pptx
@@ -7872,7 +7872,7 @@
         <p:spPr>
           <a:xfrm>
             <a:off x="310400" y="3546200"/>
-            <a:ext cx="4745100" cy="1015800"/>
+            <a:ext cx="4745100" cy="1293000"/>
           </a:xfrm>
           <a:prstGeom prst="rect">
             <a:avLst/>
@@ -7903,7 +7903,7 @@
                   <a:schemeClr val="dk2"/>
                 </a:solidFill>
               </a:rPr>
-              <a:t>Daniyar Abdrakhmanov, </a:t>
+              <a:t>Daniyar Abdrakhmanov</a:t>
             </a:r>
             <a:endParaRPr sz="1800">
               <a:solidFill>
@@ -7951,7 +7951,31 @@
                   <a:schemeClr val="dk2"/>
                 </a:solidFill>
               </a:rPr>
-              <a:t>type your namesssss</a:t>
+              <a:t>Madizhan Islambek</a:t>
+            </a:r>
+            <a:endParaRPr sz="1800">
+              <a:solidFill>
+                <a:schemeClr val="dk2"/>
+              </a:solidFill>
+            </a:endParaRPr>
+          </a:p>
+          <a:p>
+            <a:pPr indent="0" lvl="0" marL="0" rtl="0" algn="l">
+              <a:spcBef>
+                <a:spcPts val="0"/>
+              </a:spcBef>
+              <a:spcAft>
+                <a:spcPts val="0"/>
+              </a:spcAft>
+              <a:buNone/>
+            </a:pPr>
+            <a:r>
+              <a:rPr lang="it" sz="1800">
+                <a:solidFill>
+                  <a:schemeClr val="dk2"/>
+                </a:solidFill>
+              </a:rPr>
+              <a:t>Adrien Houdoux</a:t>
             </a:r>
             <a:endParaRPr sz="1800">
               <a:solidFill>
